--- a/SmugglerMAT.pptx
+++ b/SmugglerMAT.pptx
@@ -6216,8 +6216,8 @@
               <a:t>: </a:t>
             </a:r>
             <a:r>
-              <a:rPr lang="ko-KR" altLang="en-US" dirty="0"/>
-              <a:t>게임추가 설정 화면</a:t>
+              <a:rPr lang="ko-KR" altLang="en-US"/>
+              <a:t>아이템추가 화면</a:t>
             </a:r>
             <a:r>
               <a:rPr lang="en-US" altLang="ko-KR" dirty="0"/>
@@ -6256,7 +6256,7 @@
             </a:r>
             <a:r>
               <a:rPr lang="en-US" altLang="ko-KR" dirty="0" err="1"/>
-              <a:t>AddGame</a:t>
+              <a:t>AddItem</a:t>
             </a:r>
             <a:endParaRPr lang="ko-KR" altLang="en-US" dirty="0"/>
           </a:p>
